--- a/Modul_5/taskscheduleR.pptx
+++ b/Modul_5/taskscheduleR.pptx
@@ -10964,7 +10964,7 @@
         </p:blipFill>
         <p:spPr>
           <a:xfrm>
-            <a:off x="4059338" y="2948735"/>
+            <a:off x="4082784" y="2463494"/>
             <a:ext cx="2759867" cy="1478829"/>
           </a:xfrm>
           <a:prstGeom prst="rect">
@@ -11059,7 +11059,7 @@
         </p:blipFill>
         <p:spPr bwMode="auto">
           <a:xfrm>
-            <a:off x="786909" y="2774910"/>
+            <a:off x="810355" y="2289669"/>
             <a:ext cx="1382140" cy="576972"/>
           </a:xfrm>
           <a:prstGeom prst="rect">
@@ -11105,7 +11105,7 @@
         </p:blipFill>
         <p:spPr>
           <a:xfrm>
-            <a:off x="614715" y="3638441"/>
+            <a:off x="638161" y="3153200"/>
             <a:ext cx="1857477" cy="424183"/>
           </a:xfrm>
           <a:prstGeom prst="rect">
@@ -11135,7 +11135,7 @@
         </p:blipFill>
         <p:spPr>
           <a:xfrm>
-            <a:off x="7371180" y="3351882"/>
+            <a:off x="7394626" y="2866641"/>
             <a:ext cx="720000" cy="720000"/>
           </a:xfrm>
           <a:prstGeom prst="rect">
@@ -11165,7 +11165,7 @@
         </p:blipFill>
         <p:spPr>
           <a:xfrm>
-            <a:off x="8372206" y="2427637"/>
+            <a:off x="8395652" y="1942396"/>
             <a:ext cx="720000" cy="720000"/>
           </a:xfrm>
           <a:prstGeom prst="rect">
@@ -11195,7 +11195,7 @@
         </p:blipFill>
         <p:spPr>
           <a:xfrm>
-            <a:off x="8404512" y="3358933"/>
+            <a:off x="8427958" y="2873692"/>
             <a:ext cx="720000" cy="720000"/>
           </a:xfrm>
           <a:prstGeom prst="rect">
@@ -11225,7 +11225,7 @@
         </p:blipFill>
         <p:spPr>
           <a:xfrm>
-            <a:off x="7274404" y="2427611"/>
+            <a:off x="7297850" y="1942370"/>
             <a:ext cx="720000" cy="720000"/>
           </a:xfrm>
           <a:prstGeom prst="rect">
@@ -11261,7 +11261,7 @@
         </p:blipFill>
         <p:spPr>
           <a:xfrm>
-            <a:off x="3277649" y="2393082"/>
+            <a:off x="3301095" y="1907841"/>
             <a:ext cx="1035918" cy="1035918"/>
           </a:xfrm>
           <a:prstGeom prst="rect">
@@ -11291,7 +11291,7 @@
         </p:blipFill>
         <p:spPr>
           <a:xfrm>
-            <a:off x="2894819" y="3500603"/>
+            <a:off x="2918265" y="3015362"/>
             <a:ext cx="1805354" cy="633754"/>
           </a:xfrm>
           <a:prstGeom prst="rect">
@@ -11321,7 +11321,7 @@
         </p:blipFill>
         <p:spPr>
           <a:xfrm>
-            <a:off x="10113436" y="2756878"/>
+            <a:off x="10136882" y="2271637"/>
             <a:ext cx="877277" cy="877277"/>
           </a:xfrm>
           <a:prstGeom prst="rect">
@@ -11343,7 +11343,7 @@
         </p:nvSpPr>
         <p:spPr>
           <a:xfrm>
-            <a:off x="614715" y="4599503"/>
+            <a:off x="638161" y="4114262"/>
             <a:ext cx="1857477" cy="643139"/>
           </a:xfrm>
           <a:prstGeom prst="roundRect">
@@ -11396,7 +11396,7 @@
         </p:nvSpPr>
         <p:spPr>
           <a:xfrm>
-            <a:off x="2866870" y="4599503"/>
+            <a:off x="2890316" y="4114262"/>
             <a:ext cx="1857477" cy="643139"/>
           </a:xfrm>
           <a:prstGeom prst="roundRect">
@@ -11457,7 +11457,7 @@
         </p:blipFill>
         <p:spPr>
           <a:xfrm>
-            <a:off x="4811225" y="2204782"/>
+            <a:off x="4834671" y="1719541"/>
             <a:ext cx="2291081" cy="1122845"/>
           </a:xfrm>
           <a:prstGeom prst="rect">
@@ -11479,7 +11479,7 @@
         </p:nvSpPr>
         <p:spPr>
           <a:xfrm>
-            <a:off x="5119025" y="4599503"/>
+            <a:off x="5142471" y="4114262"/>
             <a:ext cx="1857477" cy="643139"/>
           </a:xfrm>
           <a:prstGeom prst="roundRect">
@@ -11547,7 +11547,7 @@
         </p:blipFill>
         <p:spPr>
           <a:xfrm>
-            <a:off x="6008864" y="3147611"/>
+            <a:off x="6032310" y="2662370"/>
             <a:ext cx="918090" cy="1060585"/>
           </a:xfrm>
           <a:prstGeom prst="rect">
@@ -11569,7 +11569,7 @@
         </p:nvSpPr>
         <p:spPr>
           <a:xfrm>
-            <a:off x="7371180" y="4599503"/>
+            <a:off x="7394626" y="4114262"/>
             <a:ext cx="1857477" cy="643139"/>
           </a:xfrm>
           <a:prstGeom prst="roundRect">
@@ -11622,7 +11622,7 @@
         </p:nvSpPr>
         <p:spPr>
           <a:xfrm>
-            <a:off x="9623337" y="4599503"/>
+            <a:off x="9646783" y="4114262"/>
             <a:ext cx="1857477" cy="643139"/>
           </a:xfrm>
           <a:prstGeom prst="roundRect">
@@ -11661,6 +11661,96 @@
           </a:p>
         </p:txBody>
       </p:sp>
+      <p:pic>
+        <p:nvPicPr>
+          <p:cNvPr id="3" name="Picture 2" descr="File:Google Gemini logo 2025.svg - Wikimedia Commons">
+            <a:extLst>
+              <a:ext uri="{FF2B5EF4-FFF2-40B4-BE49-F238E27FC236}">
+                <a16:creationId xmlns:a16="http://schemas.microsoft.com/office/drawing/2014/main" id="{07D0C769-4867-319E-AD56-986F43ACBF27}"/>
+              </a:ext>
+            </a:extLst>
+          </p:cNvPr>
+          <p:cNvPicPr>
+            <a:picLocks noChangeAspect="1"/>
+          </p:cNvPicPr>
+          <p:nvPr/>
+        </p:nvPicPr>
+        <p:blipFill>
+          <a:blip r:embed="rId14"/>
+          <a:stretch>
+            <a:fillRect/>
+          </a:stretch>
+        </p:blipFill>
+        <p:spPr>
+          <a:xfrm>
+            <a:off x="8427958" y="5380270"/>
+            <a:ext cx="2160000" cy="488250"/>
+          </a:xfrm>
+          <a:prstGeom prst="rect">
+            <a:avLst/>
+          </a:prstGeom>
+        </p:spPr>
+      </p:pic>
+      <p:pic>
+        <p:nvPicPr>
+          <p:cNvPr id="15" name="Picture 14" descr="Datei:ChatGPT-Logo.svg – Wikipedia">
+            <a:extLst>
+              <a:ext uri="{FF2B5EF4-FFF2-40B4-BE49-F238E27FC236}">
+                <a16:creationId xmlns:a16="http://schemas.microsoft.com/office/drawing/2014/main" id="{96AD5BAE-385C-6F63-5D33-23861F664B11}"/>
+              </a:ext>
+            </a:extLst>
+          </p:cNvPr>
+          <p:cNvPicPr>
+            <a:picLocks noChangeAspect="1"/>
+          </p:cNvPicPr>
+          <p:nvPr/>
+        </p:nvPicPr>
+        <p:blipFill>
+          <a:blip r:embed="rId15"/>
+          <a:stretch>
+            <a:fillRect/>
+          </a:stretch>
+        </p:blipFill>
+        <p:spPr>
+          <a:xfrm>
+            <a:off x="5620211" y="5264395"/>
+            <a:ext cx="720000" cy="720000"/>
+          </a:xfrm>
+          <a:prstGeom prst="rect">
+            <a:avLst/>
+          </a:prstGeom>
+        </p:spPr>
+      </p:pic>
+      <p:pic>
+        <p:nvPicPr>
+          <p:cNvPr id="19" name="Picture 18" descr="Datei:Claude AI logo.svg – Wikipedia">
+            <a:extLst>
+              <a:ext uri="{FF2B5EF4-FFF2-40B4-BE49-F238E27FC236}">
+                <a16:creationId xmlns:a16="http://schemas.microsoft.com/office/drawing/2014/main" id="{791E17D6-C348-3512-C771-6D328B88E727}"/>
+              </a:ext>
+            </a:extLst>
+          </p:cNvPr>
+          <p:cNvPicPr>
+            <a:picLocks noChangeAspect="1"/>
+          </p:cNvPicPr>
+          <p:nvPr/>
+        </p:nvPicPr>
+        <p:blipFill>
+          <a:blip r:embed="rId16"/>
+          <a:stretch>
+            <a:fillRect/>
+          </a:stretch>
+        </p:blipFill>
+        <p:spPr>
+          <a:xfrm>
+            <a:off x="1566899" y="5406659"/>
+            <a:ext cx="2159604" cy="463977"/>
+          </a:xfrm>
+          <a:prstGeom prst="rect">
+            <a:avLst/>
+          </a:prstGeom>
+        </p:spPr>
+      </p:pic>
     </p:spTree>
     <p:extLst>
       <p:ext uri="{BB962C8B-B14F-4D97-AF65-F5344CB8AC3E}">
